--- a/neerlandais1/powerpoints/Module_11_Scheidbare_werkwoorden.pptx
+++ b/neerlandais1/powerpoints/Module_11_Scheidbare_werkwoorden.pptx
@@ -132,18 +132,18 @@
   <p:extLst>
     <p:ext uri="{521415D9-36F7-43E2-AB2F-B90AF26B5E84}">
       <p14:sectionLst xmlns:p14="http://schemas.microsoft.com/office/powerpoint/2010/main">
-        <p14:section name="Ouverture" id="{b61f645c-3200-ffd2-c5e7-bb5833b43954}">
+        <p14:section name="Ouverture" id="{453be645-e99d-6d85-aa4d-cad71f11a0f2}">
           <p14:sldIdLst>
             <p14:sldId id="256"/>
           </p14:sldIdLst>
         </p14:section>
-        <p14:section name="Découvrir" id="{f323b992-7964-d8b7-641a-53a2a08765a4}">
+        <p14:section name="Découvrir" id="{f251cfe1-8b12-8f1f-111b-c02bc1e1344e}">
           <p14:sldIdLst>
             <p14:sldId id="257"/>
             <p14:sldId id="258"/>
           </p14:sldIdLst>
         </p14:section>
-        <p14:section name="Comprendre" id="{5fcbfae7-f881-6d69-1668-4bf25f356a60}">
+        <p14:section name="Comprendre" id="{4574ab79-26ce-95b1-16be-32d6d48155e4}">
           <p14:sldIdLst>
             <p14:sldId id="259"/>
             <p14:sldId id="260"/>
@@ -156,7 +156,7 @@
             <p14:sldId id="267"/>
           </p14:sldIdLst>
         </p14:section>
-        <p14:section name="JIJ NU ! — Oefeningen" id="{3998c436-4305-10a7-0d93-4510f9e7bfd5}">
+        <p14:section name="JIJ NU ! — Oefeningen" id="{d3d8a99c-0da0-86c4-c31c-236a036e970d}">
           <p14:sldIdLst>
             <p14:sldId id="268"/>
             <p14:sldId id="269"/>
@@ -173,7 +173,7 @@
             <p14:sldId id="280"/>
           </p14:sldIdLst>
         </p14:section>
-        <p14:section name="Clôture" id="{88e45656-a346-2c62-3149-560e65f7104e}">
+        <p14:section name="Clôture" id="{c7354555-e261-d14e-086b-980805a4957b}">
           <p14:sldIdLst>
             <p14:sldId id="281"/>
           </p14:sldIdLst>
@@ -672,7 +672,7 @@
             <a:r>
               <a:rPr lang="en-US" dirty="0"/>
               <a:t>Objectif : Utiliser les verbes à particule dans les questions et à l'impératif.
-L'impératif = le radical en tête (Kom!), la particule reste au bout. binnenkomen (entrer) et dichtdoen (fermer) sont très fréquents. Ajoutez alstublieft pour la politesse (M8).</a:t>
+L'impératif = le radical en tête (Kom!), la particule reste au bout. binnenkomen (entrer) et dichtdoen (fermer) sont très fréquents. Ajoutez alstublieft pour la politesse (M8). L'impératif est approfondi au M16.</a:t>
             </a:r>
             <a:endParaRPr lang="en-US" dirty="0"/>
           </a:p>
@@ -3714,7 +3714,7 @@
                   <a:srgbClr val="FFFFFF"/>
                 </a:solidFill>
               </a:rPr>
-              <a:t>MODULE 11 / 15</a:t>
+              <a:t>MODULE 11 / 19</a:t>
             </a:r>
             <a:endParaRPr lang="en-US" sz="1400" dirty="0"/>
           </a:p>

--- a/neerlandais1/powerpoints/Module_11_Scheidbare_werkwoorden.pptx
+++ b/neerlandais1/powerpoints/Module_11_Scheidbare_werkwoorden.pptx
@@ -132,18 +132,18 @@
   <p:extLst>
     <p:ext uri="{521415D9-36F7-43E2-AB2F-B90AF26B5E84}">
       <p14:sectionLst xmlns:p14="http://schemas.microsoft.com/office/powerpoint/2010/main">
-        <p14:section name="Ouverture" id="{453be645-e99d-6d85-aa4d-cad71f11a0f2}">
+        <p14:section name="Ouverture" id="{4f60c70b-2350-9feb-2516-1b23ea5a1de0}">
           <p14:sldIdLst>
             <p14:sldId id="256"/>
           </p14:sldIdLst>
         </p14:section>
-        <p14:section name="Découvrir" id="{f251cfe1-8b12-8f1f-111b-c02bc1e1344e}">
+        <p14:section name="Découvrir" id="{c30036f9-b33a-2986-eba4-7d083ae6d786}">
           <p14:sldIdLst>
             <p14:sldId id="257"/>
             <p14:sldId id="258"/>
           </p14:sldIdLst>
         </p14:section>
-        <p14:section name="Comprendre" id="{4574ab79-26ce-95b1-16be-32d6d48155e4}">
+        <p14:section name="Comprendre" id="{c022a708-d030-0011-4164-743ed85f85bd}">
           <p14:sldIdLst>
             <p14:sldId id="259"/>
             <p14:sldId id="260"/>
@@ -156,7 +156,7 @@
             <p14:sldId id="267"/>
           </p14:sldIdLst>
         </p14:section>
-        <p14:section name="JIJ NU ! — Oefeningen" id="{d3d8a99c-0da0-86c4-c31c-236a036e970d}">
+        <p14:section name="JIJ NU ! — Oefeningen" id="{d329b57f-2147-eebb-0a6a-3982bd37436f}">
           <p14:sldIdLst>
             <p14:sldId id="268"/>
             <p14:sldId id="269"/>
@@ -173,7 +173,7 @@
             <p14:sldId id="280"/>
           </p14:sldIdLst>
         </p14:section>
-        <p14:section name="Clôture" id="{c7354555-e261-d14e-086b-980805a4957b}">
+        <p14:section name="Clôture" id="{77d2af2b-82a6-7fd6-e34b-c35bdd0dbf5b}">
           <p14:sldIdLst>
             <p14:sldId id="281"/>
           </p14:sldIdLst>
@@ -3714,7 +3714,7 @@
                   <a:srgbClr val="FFFFFF"/>
                 </a:solidFill>
               </a:rPr>
-              <a:t>MODULE 11 / 19</a:t>
+              <a:t>MODULE 11 / 24</a:t>
             </a:r>
             <a:endParaRPr lang="en-US" sz="1400" dirty="0"/>
           </a:p>

--- a/neerlandais1/powerpoints/Module_11_Scheidbare_werkwoorden.pptx
+++ b/neerlandais1/powerpoints/Module_11_Scheidbare_werkwoorden.pptx
@@ -132,18 +132,18 @@
   <p:extLst>
     <p:ext uri="{521415D9-36F7-43E2-AB2F-B90AF26B5E84}">
       <p14:sectionLst xmlns:p14="http://schemas.microsoft.com/office/powerpoint/2010/main">
-        <p14:section name="Ouverture" id="{4f60c70b-2350-9feb-2516-1b23ea5a1de0}">
+        <p14:section name="Ouverture" id="{6e372fa0-2276-5f57-9c81-1d704541b1bf}">
           <p14:sldIdLst>
             <p14:sldId id="256"/>
           </p14:sldIdLst>
         </p14:section>
-        <p14:section name="Découvrir" id="{c30036f9-b33a-2986-eba4-7d083ae6d786}">
+        <p14:section name="Découvrir" id="{2a3e9ca4-6f4e-f823-1975-8842d3f8564a}">
           <p14:sldIdLst>
             <p14:sldId id="257"/>
             <p14:sldId id="258"/>
           </p14:sldIdLst>
         </p14:section>
-        <p14:section name="Comprendre" id="{c022a708-d030-0011-4164-743ed85f85bd}">
+        <p14:section name="Comprendre" id="{41dd1c6c-ba08-961a-9caa-4fac8c7a0ffc}">
           <p14:sldIdLst>
             <p14:sldId id="259"/>
             <p14:sldId id="260"/>
@@ -156,7 +156,7 @@
             <p14:sldId id="267"/>
           </p14:sldIdLst>
         </p14:section>
-        <p14:section name="JIJ NU ! — Oefeningen" id="{d329b57f-2147-eebb-0a6a-3982bd37436f}">
+        <p14:section name="JIJ NU ! — Oefeningen" id="{a8597f49-1ece-9e09-dce3-0130647fcc1c}">
           <p14:sldIdLst>
             <p14:sldId id="268"/>
             <p14:sldId id="269"/>
@@ -173,7 +173,7 @@
             <p14:sldId id="280"/>
           </p14:sldIdLst>
         </p14:section>
-        <p14:section name="Clôture" id="{77d2af2b-82a6-7fd6-e34b-c35bdd0dbf5b}">
+        <p14:section name="Clôture" id="{202ce680-a621-eceb-e7c8-3326239540c9}">
           <p14:sldIdLst>
             <p14:sldId id="281"/>
           </p14:sldIdLst>
@@ -3714,7 +3714,7 @@
                   <a:srgbClr val="FFFFFF"/>
                 </a:solidFill>
               </a:rPr>
-              <a:t>MODULE 11 / 24</a:t>
+              <a:t>MODULE 11 / 29</a:t>
             </a:r>
             <a:endParaRPr lang="en-US" sz="1400" dirty="0"/>
           </a:p>

--- a/neerlandais1/powerpoints/Module_11_Scheidbare_werkwoorden.pptx
+++ b/neerlandais1/powerpoints/Module_11_Scheidbare_werkwoorden.pptx
@@ -132,18 +132,18 @@
   <p:extLst>
     <p:ext uri="{521415D9-36F7-43E2-AB2F-B90AF26B5E84}">
       <p14:sectionLst xmlns:p14="http://schemas.microsoft.com/office/powerpoint/2010/main">
-        <p14:section name="Ouverture" id="{6e372fa0-2276-5f57-9c81-1d704541b1bf}">
+        <p14:section name="Ouverture" id="{ffb1c0b4-f741-ebbb-fbff-e18e351f63f6}">
           <p14:sldIdLst>
             <p14:sldId id="256"/>
           </p14:sldIdLst>
         </p14:section>
-        <p14:section name="Découvrir" id="{2a3e9ca4-6f4e-f823-1975-8842d3f8564a}">
+        <p14:section name="Découvrir" id="{b31b0280-dc4e-5e2c-52fb-40b5397089fc}">
           <p14:sldIdLst>
             <p14:sldId id="257"/>
             <p14:sldId id="258"/>
           </p14:sldIdLst>
         </p14:section>
-        <p14:section name="Comprendre" id="{41dd1c6c-ba08-961a-9caa-4fac8c7a0ffc}">
+        <p14:section name="Comprendre" id="{2ccd5360-2830-ebab-f208-b0cbaf0e487f}">
           <p14:sldIdLst>
             <p14:sldId id="259"/>
             <p14:sldId id="260"/>
@@ -156,7 +156,7 @@
             <p14:sldId id="267"/>
           </p14:sldIdLst>
         </p14:section>
-        <p14:section name="JIJ NU ! — Oefeningen" id="{a8597f49-1ece-9e09-dce3-0130647fcc1c}">
+        <p14:section name="JIJ NU ! — Oefeningen" id="{cca2ce0b-5157-ce31-a5f7-ae463927fa84}">
           <p14:sldIdLst>
             <p14:sldId id="268"/>
             <p14:sldId id="269"/>
@@ -173,7 +173,7 @@
             <p14:sldId id="280"/>
           </p14:sldIdLst>
         </p14:section>
-        <p14:section name="Clôture" id="{202ce680-a621-eceb-e7c8-3326239540c9}">
+        <p14:section name="Clôture" id="{fd6ed5cd-5655-78d2-fb67-43f5ab98060a}">
           <p14:sldIdLst>
             <p14:sldId id="281"/>
           </p14:sldIdLst>
@@ -3714,7 +3714,7 @@
                   <a:srgbClr val="FFFFFF"/>
                 </a:solidFill>
               </a:rPr>
-              <a:t>MODULE 11 / 29</a:t>
+              <a:t>MODULE 11 / 32</a:t>
             </a:r>
             <a:endParaRPr lang="en-US" sz="1400" dirty="0"/>
           </a:p>

--- a/neerlandais1/powerpoints/Module_11_Scheidbare_werkwoorden.pptx
+++ b/neerlandais1/powerpoints/Module_11_Scheidbare_werkwoorden.pptx
@@ -132,18 +132,18 @@
   <p:extLst>
     <p:ext uri="{521415D9-36F7-43E2-AB2F-B90AF26B5E84}">
       <p14:sectionLst xmlns:p14="http://schemas.microsoft.com/office/powerpoint/2010/main">
-        <p14:section name="Ouverture" id="{ffb1c0b4-f741-ebbb-fbff-e18e351f63f6}">
+        <p14:section name="Ouverture" id="{9d2d6012-c8aa-43d4-8f0f-be559dc2b668}">
           <p14:sldIdLst>
             <p14:sldId id="256"/>
           </p14:sldIdLst>
         </p14:section>
-        <p14:section name="Découvrir" id="{b31b0280-dc4e-5e2c-52fb-40b5397089fc}">
+        <p14:section name="Découvrir" id="{69f219c2-492c-67a8-e71a-8ac674eec616}">
           <p14:sldIdLst>
             <p14:sldId id="257"/>
             <p14:sldId id="258"/>
           </p14:sldIdLst>
         </p14:section>
-        <p14:section name="Comprendre" id="{2ccd5360-2830-ebab-f208-b0cbaf0e487f}">
+        <p14:section name="Comprendre" id="{8cf03167-cc4f-48b1-7cff-22cea7b25b69}">
           <p14:sldIdLst>
             <p14:sldId id="259"/>
             <p14:sldId id="260"/>
@@ -156,7 +156,7 @@
             <p14:sldId id="267"/>
           </p14:sldIdLst>
         </p14:section>
-        <p14:section name="JIJ NU ! — Oefeningen" id="{cca2ce0b-5157-ce31-a5f7-ae463927fa84}">
+        <p14:section name="JIJ NU ! — Oefeningen" id="{709fbe07-f85d-0754-1222-efcbec5562aa}">
           <p14:sldIdLst>
             <p14:sldId id="268"/>
             <p14:sldId id="269"/>
@@ -173,7 +173,7 @@
             <p14:sldId id="280"/>
           </p14:sldIdLst>
         </p14:section>
-        <p14:section name="Clôture" id="{fd6ed5cd-5655-78d2-fb67-43f5ab98060a}">
+        <p14:section name="Clôture" id="{67f40666-4113-7847-5eb3-848d10ae194d}">
           <p14:sldIdLst>
             <p14:sldId id="281"/>
           </p14:sldIdLst>

--- a/neerlandais1/powerpoints/Module_11_Scheidbare_werkwoorden.pptx
+++ b/neerlandais1/powerpoints/Module_11_Scheidbare_werkwoorden.pptx
@@ -132,18 +132,18 @@
   <p:extLst>
     <p:ext uri="{521415D9-36F7-43E2-AB2F-B90AF26B5E84}">
       <p14:sectionLst xmlns:p14="http://schemas.microsoft.com/office/powerpoint/2010/main">
-        <p14:section name="Ouverture" id="{9d2d6012-c8aa-43d4-8f0f-be559dc2b668}">
+        <p14:section name="Ouverture" id="{e9c72319-4921-76b4-33b8-4a01f6e89c93}">
           <p14:sldIdLst>
             <p14:sldId id="256"/>
           </p14:sldIdLst>
         </p14:section>
-        <p14:section name="Découvrir" id="{69f219c2-492c-67a8-e71a-8ac674eec616}">
+        <p14:section name="Découvrir" id="{fcec7f78-c264-f368-aeda-786e73453777}">
           <p14:sldIdLst>
             <p14:sldId id="257"/>
             <p14:sldId id="258"/>
           </p14:sldIdLst>
         </p14:section>
-        <p14:section name="Comprendre" id="{8cf03167-cc4f-48b1-7cff-22cea7b25b69}">
+        <p14:section name="Comprendre" id="{57a178a9-63a1-5aae-d32b-c6849cad183d}">
           <p14:sldIdLst>
             <p14:sldId id="259"/>
             <p14:sldId id="260"/>
@@ -156,7 +156,7 @@
             <p14:sldId id="267"/>
           </p14:sldIdLst>
         </p14:section>
-        <p14:section name="JIJ NU ! — Oefeningen" id="{709fbe07-f85d-0754-1222-efcbec5562aa}">
+        <p14:section name="JIJ NU ! — Oefeningen" id="{fc46a4c6-fefa-82eb-edae-03c026ded1d9}">
           <p14:sldIdLst>
             <p14:sldId id="268"/>
             <p14:sldId id="269"/>
@@ -173,7 +173,7 @@
             <p14:sldId id="280"/>
           </p14:sldIdLst>
         </p14:section>
-        <p14:section name="Clôture" id="{67f40666-4113-7847-5eb3-848d10ae194d}">
+        <p14:section name="Clôture" id="{16858c8f-5240-529a-4aaa-e626892fa36f}">
           <p14:sldIdLst>
             <p14:sldId id="281"/>
           </p14:sldIdLst>

--- a/neerlandais1/powerpoints/Module_11_Scheidbare_werkwoorden.pptx
+++ b/neerlandais1/powerpoints/Module_11_Scheidbare_werkwoorden.pptx
@@ -132,18 +132,18 @@
   <p:extLst>
     <p:ext uri="{521415D9-36F7-43E2-AB2F-B90AF26B5E84}">
       <p14:sectionLst xmlns:p14="http://schemas.microsoft.com/office/powerpoint/2010/main">
-        <p14:section name="Ouverture" id="{e9c72319-4921-76b4-33b8-4a01f6e89c93}">
+        <p14:section name="Ouverture" id="{ef4a831a-6f94-9422-5bc7-6aee8a648fe1}">
           <p14:sldIdLst>
             <p14:sldId id="256"/>
           </p14:sldIdLst>
         </p14:section>
-        <p14:section name="Découvrir" id="{fcec7f78-c264-f368-aeda-786e73453777}">
+        <p14:section name="Découvrir" id="{eeca2894-7487-5f93-491d-bbb4669066ad}">
           <p14:sldIdLst>
             <p14:sldId id="257"/>
             <p14:sldId id="258"/>
           </p14:sldIdLst>
         </p14:section>
-        <p14:section name="Comprendre" id="{57a178a9-63a1-5aae-d32b-c6849cad183d}">
+        <p14:section name="Comprendre" id="{273f5a95-c377-b948-c0a5-64f4dbeec376}">
           <p14:sldIdLst>
             <p14:sldId id="259"/>
             <p14:sldId id="260"/>
@@ -156,7 +156,7 @@
             <p14:sldId id="267"/>
           </p14:sldIdLst>
         </p14:section>
-        <p14:section name="JIJ NU ! — Oefeningen" id="{fc46a4c6-fefa-82eb-edae-03c026ded1d9}">
+        <p14:section name="JIJ NU ! — Oefeningen" id="{dc7a147a-5e55-9352-e26f-92f15427a2f6}">
           <p14:sldIdLst>
             <p14:sldId id="268"/>
             <p14:sldId id="269"/>
@@ -173,7 +173,7 @@
             <p14:sldId id="280"/>
           </p14:sldIdLst>
         </p14:section>
-        <p14:section name="Clôture" id="{16858c8f-5240-529a-4aaa-e626892fa36f}">
+        <p14:section name="Clôture" id="{2f429a39-319e-8d78-807b-ea45a44a2080}">
           <p14:sldIdLst>
             <p14:sldId id="281"/>
           </p14:sldIdLst>

--- a/neerlandais1/powerpoints/Module_11_Scheidbare_werkwoorden.pptx
+++ b/neerlandais1/powerpoints/Module_11_Scheidbare_werkwoorden.pptx
@@ -132,18 +132,18 @@
   <p:extLst>
     <p:ext uri="{521415D9-36F7-43E2-AB2F-B90AF26B5E84}">
       <p14:sectionLst xmlns:p14="http://schemas.microsoft.com/office/powerpoint/2010/main">
-        <p14:section name="Ouverture" id="{ef4a831a-6f94-9422-5bc7-6aee8a648fe1}">
+        <p14:section name="Ouverture" id="{a5a9feb5-9125-6c8f-2e20-cf2f3b5fb9b8}">
           <p14:sldIdLst>
             <p14:sldId id="256"/>
           </p14:sldIdLst>
         </p14:section>
-        <p14:section name="Découvrir" id="{eeca2894-7487-5f93-491d-bbb4669066ad}">
+        <p14:section name="Découvrir" id="{1c5cfa3f-6e05-28e8-6971-8d107c181828}">
           <p14:sldIdLst>
             <p14:sldId id="257"/>
             <p14:sldId id="258"/>
           </p14:sldIdLst>
         </p14:section>
-        <p14:section name="Comprendre" id="{273f5a95-c377-b948-c0a5-64f4dbeec376}">
+        <p14:section name="Comprendre" id="{cb53ca90-f6a3-5cd3-d0c2-8f05fdf8ca65}">
           <p14:sldIdLst>
             <p14:sldId id="259"/>
             <p14:sldId id="260"/>
@@ -156,7 +156,7 @@
             <p14:sldId id="267"/>
           </p14:sldIdLst>
         </p14:section>
-        <p14:section name="JIJ NU ! — Oefeningen" id="{dc7a147a-5e55-9352-e26f-92f15427a2f6}">
+        <p14:section name="JIJ NU ! — Oefeningen" id="{ab29cd9e-4821-a091-67b6-0c1f9fbcea87}">
           <p14:sldIdLst>
             <p14:sldId id="268"/>
             <p14:sldId id="269"/>
@@ -173,7 +173,7 @@
             <p14:sldId id="280"/>
           </p14:sldIdLst>
         </p14:section>
-        <p14:section name="Clôture" id="{2f429a39-319e-8d78-807b-ea45a44a2080}">
+        <p14:section name="Clôture" id="{4c51a908-c11d-57c8-b7d9-d40684778bdb}">
           <p14:sldIdLst>
             <p14:sldId id="281"/>
           </p14:sldIdLst>

--- a/neerlandais1/powerpoints/Module_11_Scheidbare_werkwoorden.pptx
+++ b/neerlandais1/powerpoints/Module_11_Scheidbare_werkwoorden.pptx
@@ -132,18 +132,18 @@
   <p:extLst>
     <p:ext uri="{521415D9-36F7-43E2-AB2F-B90AF26B5E84}">
       <p14:sectionLst xmlns:p14="http://schemas.microsoft.com/office/powerpoint/2010/main">
-        <p14:section name="Ouverture" id="{a5a9feb5-9125-6c8f-2e20-cf2f3b5fb9b8}">
+        <p14:section name="Ouverture" id="{fe56e50a-a7ca-dd3a-c0c6-28ad54d7fa66}">
           <p14:sldIdLst>
             <p14:sldId id="256"/>
           </p14:sldIdLst>
         </p14:section>
-        <p14:section name="Découvrir" id="{1c5cfa3f-6e05-28e8-6971-8d107c181828}">
+        <p14:section name="Découvrir" id="{3c85b099-177c-136d-e046-527172adbade}">
           <p14:sldIdLst>
             <p14:sldId id="257"/>
             <p14:sldId id="258"/>
           </p14:sldIdLst>
         </p14:section>
-        <p14:section name="Comprendre" id="{cb53ca90-f6a3-5cd3-d0c2-8f05fdf8ca65}">
+        <p14:section name="Comprendre" id="{43cf0cd3-331f-1b38-d68f-0508b7d680e7}">
           <p14:sldIdLst>
             <p14:sldId id="259"/>
             <p14:sldId id="260"/>
@@ -156,7 +156,7 @@
             <p14:sldId id="267"/>
           </p14:sldIdLst>
         </p14:section>
-        <p14:section name="JIJ NU ! — Oefeningen" id="{ab29cd9e-4821-a091-67b6-0c1f9fbcea87}">
+        <p14:section name="JIJ NU ! — Oefeningen" id="{760f4487-40de-0dc9-8e8c-f8bab87693f1}">
           <p14:sldIdLst>
             <p14:sldId id="268"/>
             <p14:sldId id="269"/>
@@ -173,7 +173,7 @@
             <p14:sldId id="280"/>
           </p14:sldIdLst>
         </p14:section>
-        <p14:section name="Clôture" id="{4c51a908-c11d-57c8-b7d9-d40684778bdb}">
+        <p14:section name="Clôture" id="{eb394776-f58f-91da-66c5-c10ccc33c1e1}">
           <p14:sldIdLst>
             <p14:sldId id="281"/>
           </p14:sldIdLst>

--- a/neerlandais1/powerpoints/Module_11_Scheidbare_werkwoorden.pptx
+++ b/neerlandais1/powerpoints/Module_11_Scheidbare_werkwoorden.pptx
@@ -132,18 +132,18 @@
   <p:extLst>
     <p:ext uri="{521415D9-36F7-43E2-AB2F-B90AF26B5E84}">
       <p14:sectionLst xmlns:p14="http://schemas.microsoft.com/office/powerpoint/2010/main">
-        <p14:section name="Ouverture" id="{fe56e50a-a7ca-dd3a-c0c6-28ad54d7fa66}">
+        <p14:section name="Ouverture" id="{842ec079-66f8-fa77-643c-af092533b6e1}">
           <p14:sldIdLst>
             <p14:sldId id="256"/>
           </p14:sldIdLst>
         </p14:section>
-        <p14:section name="Découvrir" id="{3c85b099-177c-136d-e046-527172adbade}">
+        <p14:section name="Découvrir" id="{5dee5cb1-88b8-8fc6-0813-0c62b070fecd}">
           <p14:sldIdLst>
             <p14:sldId id="257"/>
             <p14:sldId id="258"/>
           </p14:sldIdLst>
         </p14:section>
-        <p14:section name="Comprendre" id="{43cf0cd3-331f-1b38-d68f-0508b7d680e7}">
+        <p14:section name="Comprendre" id="{38f71170-5ff2-910a-df7c-e6cc00637bc5}">
           <p14:sldIdLst>
             <p14:sldId id="259"/>
             <p14:sldId id="260"/>
@@ -156,7 +156,7 @@
             <p14:sldId id="267"/>
           </p14:sldIdLst>
         </p14:section>
-        <p14:section name="JIJ NU ! — Oefeningen" id="{760f4487-40de-0dc9-8e8c-f8bab87693f1}">
+        <p14:section name="JIJ NU ! — Oefeningen" id="{75facffb-df72-7479-f711-b1dd9520257b}">
           <p14:sldIdLst>
             <p14:sldId id="268"/>
             <p14:sldId id="269"/>
@@ -173,7 +173,7 @@
             <p14:sldId id="280"/>
           </p14:sldIdLst>
         </p14:section>
-        <p14:section name="Clôture" id="{eb394776-f58f-91da-66c5-c10ccc33c1e1}">
+        <p14:section name="Clôture" id="{dd0fcf21-7232-3bd8-7722-088966f758dd}">
           <p14:sldIdLst>
             <p14:sldId id="281"/>
           </p14:sldIdLst>

--- a/neerlandais1/powerpoints/Module_11_Scheidbare_werkwoorden.pptx
+++ b/neerlandais1/powerpoints/Module_11_Scheidbare_werkwoorden.pptx
@@ -132,18 +132,18 @@
   <p:extLst>
     <p:ext uri="{521415D9-36F7-43E2-AB2F-B90AF26B5E84}">
       <p14:sectionLst xmlns:p14="http://schemas.microsoft.com/office/powerpoint/2010/main">
-        <p14:section name="Ouverture" id="{842ec079-66f8-fa77-643c-af092533b6e1}">
+        <p14:section name="Ouverture" id="{fcd7fb74-e198-64bf-f69d-176e799cfe7c}">
           <p14:sldIdLst>
             <p14:sldId id="256"/>
           </p14:sldIdLst>
         </p14:section>
-        <p14:section name="Découvrir" id="{5dee5cb1-88b8-8fc6-0813-0c62b070fecd}">
+        <p14:section name="Découvrir" id="{ee821880-cc69-8c90-6723-c030484f0f4e}">
           <p14:sldIdLst>
             <p14:sldId id="257"/>
             <p14:sldId id="258"/>
           </p14:sldIdLst>
         </p14:section>
-        <p14:section name="Comprendre" id="{38f71170-5ff2-910a-df7c-e6cc00637bc5}">
+        <p14:section name="Comprendre" id="{93b01c51-6f59-b049-ca2e-aed0aee33e1c}">
           <p14:sldIdLst>
             <p14:sldId id="259"/>
             <p14:sldId id="260"/>
@@ -156,7 +156,7 @@
             <p14:sldId id="267"/>
           </p14:sldIdLst>
         </p14:section>
-        <p14:section name="JIJ NU ! — Oefeningen" id="{75facffb-df72-7479-f711-b1dd9520257b}">
+        <p14:section name="JIJ NU ! — Oefeningen" id="{7af60597-87dc-cc22-56e6-090d08810495}">
           <p14:sldIdLst>
             <p14:sldId id="268"/>
             <p14:sldId id="269"/>
@@ -173,7 +173,7 @@
             <p14:sldId id="280"/>
           </p14:sldIdLst>
         </p14:section>
-        <p14:section name="Clôture" id="{dd0fcf21-7232-3bd8-7722-088966f758dd}">
+        <p14:section name="Clôture" id="{4ba8b7f7-7f2f-f071-ed61-ecf30d8b4b31}">
           <p14:sldIdLst>
             <p14:sldId id="281"/>
           </p14:sldIdLst>

--- a/neerlandais1/powerpoints/Module_11_Scheidbare_werkwoorden.pptx
+++ b/neerlandais1/powerpoints/Module_11_Scheidbare_werkwoorden.pptx
@@ -132,18 +132,18 @@
   <p:extLst>
     <p:ext uri="{521415D9-36F7-43E2-AB2F-B90AF26B5E84}">
       <p14:sectionLst xmlns:p14="http://schemas.microsoft.com/office/powerpoint/2010/main">
-        <p14:section name="Ouverture" id="{fcd7fb74-e198-64bf-f69d-176e799cfe7c}">
+        <p14:section name="Ouverture" id="{85c356a1-e269-1421-6e2a-a177581f74b6}">
           <p14:sldIdLst>
             <p14:sldId id="256"/>
           </p14:sldIdLst>
         </p14:section>
-        <p14:section name="Découvrir" id="{ee821880-cc69-8c90-6723-c030484f0f4e}">
+        <p14:section name="Découvrir" id="{0599aea2-3dac-600b-cf3a-6c094358a82a}">
           <p14:sldIdLst>
             <p14:sldId id="257"/>
             <p14:sldId id="258"/>
           </p14:sldIdLst>
         </p14:section>
-        <p14:section name="Comprendre" id="{93b01c51-6f59-b049-ca2e-aed0aee33e1c}">
+        <p14:section name="Comprendre" id="{2a80b18b-7690-b7cd-772e-e3c44506d2c9}">
           <p14:sldIdLst>
             <p14:sldId id="259"/>
             <p14:sldId id="260"/>
@@ -156,7 +156,7 @@
             <p14:sldId id="267"/>
           </p14:sldIdLst>
         </p14:section>
-        <p14:section name="JIJ NU ! — Oefeningen" id="{7af60597-87dc-cc22-56e6-090d08810495}">
+        <p14:section name="JIJ NU ! — Oefeningen" id="{36aae273-b17e-14bf-ee84-0ae04f96e989}">
           <p14:sldIdLst>
             <p14:sldId id="268"/>
             <p14:sldId id="269"/>
@@ -173,7 +173,7 @@
             <p14:sldId id="280"/>
           </p14:sldIdLst>
         </p14:section>
-        <p14:section name="Clôture" id="{4ba8b7f7-7f2f-f071-ed61-ecf30d8b4b31}">
+        <p14:section name="Clôture" id="{08a1d704-f4ec-9592-cb2b-5be45632ca3f}">
           <p14:sldIdLst>
             <p14:sldId id="281"/>
           </p14:sldIdLst>
